--- a/2024/2024-03-08-AI-Updates.pptx
+++ b/2024/2024-03-08-AI-Updates.pptx
@@ -1353,7 +1353,7 @@
   <p:cSld>
     <p:spTree>
       <p:nvGrpSpPr>
-        <p:cNvPr id="1" name="Shape 158"/>
+        <p:cNvPr id="1" name="Shape 159"/>
         <p:cNvGrpSpPr/>
         <p:nvPr/>
       </p:nvGrpSpPr>
@@ -1367,7 +1367,7 @@
       </p:grpSpPr>
       <p:sp>
         <p:nvSpPr>
-          <p:cNvPr id="159" name="Google Shape;159;p13:notes"/>
+          <p:cNvPr id="160" name="Google Shape;160;p13:notes"/>
           <p:cNvSpPr>
             <a:spLocks noGrp="1" noRot="1" noChangeAspect="1"/>
           </p:cNvSpPr>
@@ -1418,7 +1418,7 @@
       </p:sp>
       <p:sp>
         <p:nvSpPr>
-          <p:cNvPr id="160" name="Google Shape;160;p13:notes"/>
+          <p:cNvPr id="161" name="Google Shape;161;p13:notes"/>
           <p:cNvSpPr txBox="1">
             <a:spLocks noGrp="1"/>
           </p:cNvSpPr>
@@ -1475,7 +1475,7 @@
   <p:cSld>
     <p:spTree>
       <p:nvGrpSpPr>
-        <p:cNvPr id="1" name="Shape 171"/>
+        <p:cNvPr id="1" name="Shape 172"/>
         <p:cNvGrpSpPr/>
         <p:nvPr/>
       </p:nvGrpSpPr>
@@ -1489,7 +1489,7 @@
       </p:grpSpPr>
       <p:sp>
         <p:nvSpPr>
-          <p:cNvPr id="172" name="Google Shape;172;p14:notes"/>
+          <p:cNvPr id="173" name="Google Shape;173;p14:notes"/>
           <p:cNvSpPr>
             <a:spLocks noGrp="1" noRot="1" noChangeAspect="1"/>
           </p:cNvSpPr>
@@ -1540,7 +1540,7 @@
       </p:sp>
       <p:sp>
         <p:nvSpPr>
-          <p:cNvPr id="173" name="Google Shape;173;p14:notes"/>
+          <p:cNvPr id="174" name="Google Shape;174;p14:notes"/>
           <p:cNvSpPr txBox="1">
             <a:spLocks noGrp="1"/>
           </p:cNvSpPr>
@@ -1597,7 +1597,7 @@
   <p:cSld>
     <p:spTree>
       <p:nvGrpSpPr>
-        <p:cNvPr id="1" name="Shape 182"/>
+        <p:cNvPr id="1" name="Shape 183"/>
         <p:cNvGrpSpPr/>
         <p:nvPr/>
       </p:nvGrpSpPr>
@@ -1611,7 +1611,7 @@
       </p:grpSpPr>
       <p:sp>
         <p:nvSpPr>
-          <p:cNvPr id="183" name="Google Shape;183;p15:notes"/>
+          <p:cNvPr id="184" name="Google Shape;184;p15:notes"/>
           <p:cNvSpPr>
             <a:spLocks noGrp="1" noRot="1" noChangeAspect="1"/>
           </p:cNvSpPr>
@@ -1662,7 +1662,7 @@
       </p:sp>
       <p:sp>
         <p:nvSpPr>
-          <p:cNvPr id="184" name="Google Shape;184;p15:notes"/>
+          <p:cNvPr id="185" name="Google Shape;185;p15:notes"/>
           <p:cNvSpPr txBox="1">
             <a:spLocks noGrp="1"/>
           </p:cNvSpPr>
@@ -1719,7 +1719,7 @@
   <p:cSld>
     <p:spTree>
       <p:nvGrpSpPr>
-        <p:cNvPr id="1" name="Shape 189"/>
+        <p:cNvPr id="1" name="Shape 190"/>
         <p:cNvGrpSpPr/>
         <p:nvPr/>
       </p:nvGrpSpPr>
@@ -1733,7 +1733,7 @@
       </p:grpSpPr>
       <p:sp>
         <p:nvSpPr>
-          <p:cNvPr id="190" name="Google Shape;190;p16:notes"/>
+          <p:cNvPr id="191" name="Google Shape;191;p16:notes"/>
           <p:cNvSpPr>
             <a:spLocks noGrp="1" noRot="1" noChangeAspect="1"/>
           </p:cNvSpPr>
@@ -1784,7 +1784,7 @@
       </p:sp>
       <p:sp>
         <p:nvSpPr>
-          <p:cNvPr id="191" name="Google Shape;191;p16:notes"/>
+          <p:cNvPr id="192" name="Google Shape;192;p16:notes"/>
           <p:cNvSpPr txBox="1">
             <a:spLocks noGrp="1"/>
           </p:cNvSpPr>
@@ -1841,7 +1841,7 @@
   <p:cSld>
     <p:spTree>
       <p:nvGrpSpPr>
-        <p:cNvPr id="1" name="Shape 196"/>
+        <p:cNvPr id="1" name="Shape 197"/>
         <p:cNvGrpSpPr/>
         <p:nvPr/>
       </p:nvGrpSpPr>
@@ -1855,7 +1855,7 @@
       </p:grpSpPr>
       <p:sp>
         <p:nvSpPr>
-          <p:cNvPr id="197" name="Google Shape;197;p17:notes"/>
+          <p:cNvPr id="198" name="Google Shape;198;p17:notes"/>
           <p:cNvSpPr>
             <a:spLocks noGrp="1" noRot="1" noChangeAspect="1"/>
           </p:cNvSpPr>
@@ -1906,7 +1906,7 @@
       </p:sp>
       <p:sp>
         <p:nvSpPr>
-          <p:cNvPr id="198" name="Google Shape;198;p17:notes"/>
+          <p:cNvPr id="199" name="Google Shape;199;p17:notes"/>
           <p:cNvSpPr txBox="1">
             <a:spLocks noGrp="1"/>
           </p:cNvSpPr>
@@ -1963,7 +1963,7 @@
   <p:cSld>
     <p:spTree>
       <p:nvGrpSpPr>
-        <p:cNvPr id="1" name="Shape 205"/>
+        <p:cNvPr id="1" name="Shape 206"/>
         <p:cNvGrpSpPr/>
         <p:nvPr/>
       </p:nvGrpSpPr>
@@ -1977,7 +1977,7 @@
       </p:grpSpPr>
       <p:sp>
         <p:nvSpPr>
-          <p:cNvPr id="206" name="Google Shape;206;p18:notes"/>
+          <p:cNvPr id="207" name="Google Shape;207;p18:notes"/>
           <p:cNvSpPr>
             <a:spLocks noGrp="1" noRot="1" noChangeAspect="1"/>
           </p:cNvSpPr>
@@ -2028,7 +2028,7 @@
       </p:sp>
       <p:sp>
         <p:nvSpPr>
-          <p:cNvPr id="207" name="Google Shape;207;p18:notes"/>
+          <p:cNvPr id="208" name="Google Shape;208;p18:notes"/>
           <p:cNvSpPr txBox="1">
             <a:spLocks noGrp="1"/>
           </p:cNvSpPr>
@@ -2085,7 +2085,7 @@
   <p:cSld>
     <p:spTree>
       <p:nvGrpSpPr>
-        <p:cNvPr id="1" name="Shape 213"/>
+        <p:cNvPr id="1" name="Shape 214"/>
         <p:cNvGrpSpPr/>
         <p:nvPr/>
       </p:nvGrpSpPr>
@@ -2099,7 +2099,7 @@
       </p:grpSpPr>
       <p:sp>
         <p:nvSpPr>
-          <p:cNvPr id="214" name="Google Shape;214;p19:notes"/>
+          <p:cNvPr id="215" name="Google Shape;215;p19:notes"/>
           <p:cNvSpPr>
             <a:spLocks noGrp="1" noRot="1" noChangeAspect="1"/>
           </p:cNvSpPr>
@@ -2150,7 +2150,7 @@
       </p:sp>
       <p:sp>
         <p:nvSpPr>
-          <p:cNvPr id="215" name="Google Shape;215;p19:notes"/>
+          <p:cNvPr id="216" name="Google Shape;216;p19:notes"/>
           <p:cNvSpPr txBox="1">
             <a:spLocks noGrp="1"/>
           </p:cNvSpPr>
@@ -2329,7 +2329,7 @@
   <p:cSld>
     <p:spTree>
       <p:nvGrpSpPr>
-        <p:cNvPr id="1" name="Shape 223"/>
+        <p:cNvPr id="1" name="Shape 224"/>
         <p:cNvGrpSpPr/>
         <p:nvPr/>
       </p:nvGrpSpPr>
@@ -2343,7 +2343,7 @@
       </p:grpSpPr>
       <p:sp>
         <p:nvSpPr>
-          <p:cNvPr id="224" name="Google Shape;224;p20:notes"/>
+          <p:cNvPr id="225" name="Google Shape;225;p20:notes"/>
           <p:cNvSpPr>
             <a:spLocks noGrp="1" noRot="1" noChangeAspect="1"/>
           </p:cNvSpPr>
@@ -2394,7 +2394,7 @@
       </p:sp>
       <p:sp>
         <p:nvSpPr>
-          <p:cNvPr id="225" name="Google Shape;225;p20:notes"/>
+          <p:cNvPr id="226" name="Google Shape;226;p20:notes"/>
           <p:cNvSpPr txBox="1">
             <a:spLocks noGrp="1"/>
           </p:cNvSpPr>
@@ -2451,7 +2451,7 @@
   <p:cSld>
     <p:spTree>
       <p:nvGrpSpPr>
-        <p:cNvPr id="1" name="Shape 233"/>
+        <p:cNvPr id="1" name="Shape 234"/>
         <p:cNvGrpSpPr/>
         <p:nvPr/>
       </p:nvGrpSpPr>
@@ -2465,7 +2465,7 @@
       </p:grpSpPr>
       <p:sp>
         <p:nvSpPr>
-          <p:cNvPr id="234" name="Google Shape;234;p21:notes"/>
+          <p:cNvPr id="235" name="Google Shape;235;p21:notes"/>
           <p:cNvSpPr>
             <a:spLocks noGrp="1" noRot="1" noChangeAspect="1"/>
           </p:cNvSpPr>
@@ -2516,7 +2516,7 @@
       </p:sp>
       <p:sp>
         <p:nvSpPr>
-          <p:cNvPr id="235" name="Google Shape;235;p21:notes"/>
+          <p:cNvPr id="236" name="Google Shape;236;p21:notes"/>
           <p:cNvSpPr txBox="1">
             <a:spLocks noGrp="1"/>
           </p:cNvSpPr>
@@ -2573,7 +2573,7 @@
   <p:cSld>
     <p:spTree>
       <p:nvGrpSpPr>
-        <p:cNvPr id="1" name="Shape 243"/>
+        <p:cNvPr id="1" name="Shape 244"/>
         <p:cNvGrpSpPr/>
         <p:nvPr/>
       </p:nvGrpSpPr>
@@ -2587,7 +2587,7 @@
       </p:grpSpPr>
       <p:sp>
         <p:nvSpPr>
-          <p:cNvPr id="244" name="Google Shape;244;p22:notes"/>
+          <p:cNvPr id="245" name="Google Shape;245;p22:notes"/>
           <p:cNvSpPr>
             <a:spLocks noGrp="1" noRot="1" noChangeAspect="1"/>
           </p:cNvSpPr>
@@ -2638,7 +2638,7 @@
       </p:sp>
       <p:sp>
         <p:nvSpPr>
-          <p:cNvPr id="245" name="Google Shape;245;p22:notes"/>
+          <p:cNvPr id="246" name="Google Shape;246;p22:notes"/>
           <p:cNvSpPr txBox="1">
             <a:spLocks noGrp="1"/>
           </p:cNvSpPr>
@@ -14952,7 +14952,7 @@
         </p:nvSpPr>
         <p:spPr>
           <a:xfrm>
-            <a:off x="4650150" y="488200"/>
+            <a:off x="4650150" y="107200"/>
             <a:ext cx="4400100" cy="3020100"/>
           </a:xfrm>
           <a:prstGeom prst="rect">
@@ -15446,6 +15446,39 @@
           </a:p>
         </p:txBody>
       </p:sp>
+      <p:pic>
+        <p:nvPicPr>
+          <p:cNvPr id="158" name="Google Shape;158;p24"/>
+          <p:cNvPicPr preferRelativeResize="0"/>
+          <p:nvPr/>
+        </p:nvPicPr>
+        <p:blipFill>
+          <a:blip r:embed="rId3" cstate="email">
+            <a:alphaModFix/>
+            <a:extLst>
+              <a:ext uri="{28A0092B-C50C-407E-A947-70E740481C1C}">
+                <a14:useLocalDpi xmlns:a14="http://schemas.microsoft.com/office/drawing/2010/main"/>
+              </a:ext>
+            </a:extLst>
+          </a:blip>
+          <a:stretch>
+            <a:fillRect/>
+          </a:stretch>
+        </p:blipFill>
+        <p:spPr>
+          <a:xfrm>
+            <a:off x="5596675" y="3264750"/>
+            <a:ext cx="2689342" cy="1711399"/>
+          </a:xfrm>
+          <a:prstGeom prst="rect">
+            <a:avLst/>
+          </a:prstGeom>
+          <a:noFill/>
+          <a:ln>
+            <a:noFill/>
+          </a:ln>
+        </p:spPr>
+      </p:pic>
     </p:spTree>
   </p:cSld>
   <p:clrMapOvr>
@@ -15459,7 +15492,7 @@
   <p:cSld>
     <p:spTree>
       <p:nvGrpSpPr>
-        <p:cNvPr id="1" name="Shape 161"/>
+        <p:cNvPr id="1" name="Shape 162"/>
         <p:cNvGrpSpPr/>
         <p:nvPr/>
       </p:nvGrpSpPr>
@@ -15473,7 +15506,7 @@
       </p:grpSpPr>
       <p:sp>
         <p:nvSpPr>
-          <p:cNvPr id="162" name="Google Shape;162;p25"/>
+          <p:cNvPr id="163" name="Google Shape;163;p25"/>
           <p:cNvSpPr txBox="1"/>
           <p:nvPr/>
         </p:nvSpPr>
@@ -15539,13 +15572,13 @@
       </p:sp>
       <p:sp>
         <p:nvSpPr>
-          <p:cNvPr id="163" name="Google Shape;163;p25"/>
+          <p:cNvPr id="164" name="Google Shape;164;p25"/>
           <p:cNvSpPr txBox="1"/>
           <p:nvPr/>
         </p:nvSpPr>
         <p:spPr>
           <a:xfrm>
-            <a:off x="72300" y="2385456"/>
+            <a:off x="72300" y="2095608"/>
             <a:ext cx="3592800" cy="1185300"/>
           </a:xfrm>
           <a:prstGeom prst="rect">
@@ -15640,7 +15673,7 @@
               <a:buNone/>
             </a:pPr>
             <a:r>
-              <a:rPr lang="en" sz="1300" b="0" i="0" u="sng" strike="noStrike" cap="none">
+              <a:rPr lang="en" sz="1000" b="0" i="0" u="sng" strike="noStrike" cap="none">
                 <a:solidFill>
                   <a:schemeClr val="hlink"/>
                 </a:solidFill>
@@ -15653,6 +15686,18 @@
               <a:t>https://humbot.ai</a:t>
             </a:r>
             <a:r>
+              <a:rPr lang="en" sz="1000" b="0" i="0" u="none" strike="noStrike" cap="none">
+                <a:solidFill>
+                  <a:srgbClr val="000000"/>
+                </a:solidFill>
+                <a:latin typeface="Calibri"/>
+                <a:ea typeface="Calibri"/>
+                <a:cs typeface="Calibri"/>
+                <a:sym typeface="Calibri"/>
+              </a:rPr>
+              <a:t> </a:t>
+            </a:r>
+            <a:r>
               <a:rPr lang="en" sz="1300" b="0" i="0" u="none" strike="noStrike" cap="none">
                 <a:solidFill>
                   <a:srgbClr val="000000"/>
@@ -15662,7 +15707,7 @@
                 <a:cs typeface="Calibri"/>
                 <a:sym typeface="Calibri"/>
               </a:rPr>
-              <a:t> - humanize AI text into authentic and original content undetectable by most AI content detectors</a:t>
+              <a:t>- humanize AI text into authentic and original content undetectable by most AI content detectors</a:t>
             </a:r>
             <a:endParaRPr sz="1300" b="0" i="0" u="none" strike="noStrike" cap="none">
               <a:solidFill>
@@ -15693,7 +15738,7 @@
               <a:buNone/>
             </a:pPr>
             <a:r>
-              <a:rPr lang="en" sz="1300" b="0" i="0" u="sng" strike="noStrike" cap="none">
+              <a:rPr lang="en" sz="1000" b="0" i="0" u="sng" strike="noStrike" cap="none">
                 <a:solidFill>
                   <a:schemeClr val="hlink"/>
                 </a:solidFill>
@@ -15731,14 +15776,14 @@
       </p:sp>
       <p:sp>
         <p:nvSpPr>
-          <p:cNvPr id="164" name="Google Shape;164;p25"/>
+          <p:cNvPr id="165" name="Google Shape;165;p25"/>
           <p:cNvSpPr txBox="1"/>
           <p:nvPr/>
         </p:nvSpPr>
         <p:spPr>
           <a:xfrm>
             <a:off x="72300" y="541550"/>
-            <a:ext cx="3592800" cy="1785600"/>
+            <a:ext cx="3592800" cy="1462200"/>
           </a:xfrm>
           <a:prstGeom prst="rect">
             <a:avLst/>
@@ -15814,25 +15859,25 @@
             </a:endParaRPr>
           </a:p>
           <a:p>
-            <a:pPr marL="228600" marR="0" lvl="0" indent="-196850" algn="l" rtl="0">
-              <a:lnSpc>
-                <a:spcPct val="100000"/>
-              </a:lnSpc>
-              <a:spcBef>
-                <a:spcPts val="0"/>
-              </a:spcBef>
-              <a:spcAft>
-                <a:spcPts val="0"/>
-              </a:spcAft>
-              <a:buClr>
-                <a:srgbClr val="000000"/>
-              </a:buClr>
-              <a:buSzPts val="1300"/>
+            <a:pPr marL="228600" marR="0" lvl="0" indent="-177800" algn="l" rtl="0">
+              <a:lnSpc>
+                <a:spcPct val="100000"/>
+              </a:lnSpc>
+              <a:spcBef>
+                <a:spcPts val="0"/>
+              </a:spcBef>
+              <a:spcAft>
+                <a:spcPts val="0"/>
+              </a:spcAft>
+              <a:buClr>
+                <a:srgbClr val="000000"/>
+              </a:buClr>
+              <a:buSzPts val="1000"/>
               <a:buFont typeface="Calibri"/>
               <a:buChar char="●"/>
             </a:pPr>
             <a:r>
-              <a:rPr lang="en" sz="1300" b="0" i="0" u="sng" strike="noStrike" cap="none">
+              <a:rPr lang="en" sz="1000" b="0" i="0" u="sng" strike="noStrike" cap="none">
                 <a:solidFill>
                   <a:schemeClr val="hlink"/>
                 </a:solidFill>
@@ -15844,7 +15889,7 @@
               </a:rPr>
               <a:t>https://originality.ai</a:t>
             </a:r>
-            <a:endParaRPr sz="1300" b="0" i="0" u="none" strike="noStrike" cap="none">
+            <a:endParaRPr sz="1000" b="0" i="0" u="none" strike="noStrike" cap="none">
               <a:solidFill>
                 <a:srgbClr val="000000"/>
               </a:solidFill>
@@ -15855,25 +15900,25 @@
             </a:endParaRPr>
           </a:p>
           <a:p>
-            <a:pPr marL="228600" marR="0" lvl="0" indent="-196850" algn="l" rtl="0">
-              <a:lnSpc>
-                <a:spcPct val="100000"/>
-              </a:lnSpc>
-              <a:spcBef>
-                <a:spcPts val="0"/>
-              </a:spcBef>
-              <a:spcAft>
-                <a:spcPts val="0"/>
-              </a:spcAft>
-              <a:buClr>
-                <a:srgbClr val="000000"/>
-              </a:buClr>
-              <a:buSzPts val="1300"/>
+            <a:pPr marL="228600" marR="0" lvl="0" indent="-177800" algn="l" rtl="0">
+              <a:lnSpc>
+                <a:spcPct val="100000"/>
+              </a:lnSpc>
+              <a:spcBef>
+                <a:spcPts val="0"/>
+              </a:spcBef>
+              <a:spcAft>
+                <a:spcPts val="0"/>
+              </a:spcAft>
+              <a:buClr>
+                <a:srgbClr val="000000"/>
+              </a:buClr>
+              <a:buSzPts val="1000"/>
               <a:buFont typeface="Calibri"/>
               <a:buChar char="●"/>
             </a:pPr>
             <a:r>
-              <a:rPr lang="en" sz="1300" b="0" i="0" u="sng" strike="noStrike" cap="none">
+              <a:rPr lang="en" sz="1000" b="0" i="0" u="sng" strike="noStrike" cap="none">
                 <a:solidFill>
                   <a:schemeClr val="hlink"/>
                 </a:solidFill>
@@ -15886,7 +15931,7 @@
               <a:t>https://www.zerogpt.com</a:t>
             </a:r>
             <a:r>
-              <a:rPr lang="en" sz="1300" b="0" i="0" u="none" strike="noStrike" cap="none">
+              <a:rPr lang="en" sz="1000" b="0" i="0" u="none" strike="noStrike" cap="none">
                 <a:solidFill>
                   <a:srgbClr val="000000"/>
                 </a:solidFill>
@@ -15897,7 +15942,7 @@
               </a:rPr>
               <a:t> </a:t>
             </a:r>
-            <a:endParaRPr sz="1300" b="0" i="0" u="none" strike="noStrike" cap="none">
+            <a:endParaRPr sz="1000" b="0" i="0" u="none" strike="noStrike" cap="none">
               <a:solidFill>
                 <a:srgbClr val="000000"/>
               </a:solidFill>
@@ -15908,25 +15953,25 @@
             </a:endParaRPr>
           </a:p>
           <a:p>
-            <a:pPr marL="228600" marR="0" lvl="0" indent="-196850" algn="l" rtl="0">
-              <a:lnSpc>
-                <a:spcPct val="100000"/>
-              </a:lnSpc>
-              <a:spcBef>
-                <a:spcPts val="0"/>
-              </a:spcBef>
-              <a:spcAft>
-                <a:spcPts val="0"/>
-              </a:spcAft>
-              <a:buClr>
-                <a:srgbClr val="000000"/>
-              </a:buClr>
-              <a:buSzPts val="1300"/>
+            <a:pPr marL="228600" marR="0" lvl="0" indent="-177800" algn="l" rtl="0">
+              <a:lnSpc>
+                <a:spcPct val="100000"/>
+              </a:lnSpc>
+              <a:spcBef>
+                <a:spcPts val="0"/>
+              </a:spcBef>
+              <a:spcAft>
+                <a:spcPts val="0"/>
+              </a:spcAft>
+              <a:buClr>
+                <a:srgbClr val="000000"/>
+              </a:buClr>
+              <a:buSzPts val="1000"/>
               <a:buFont typeface="Calibri"/>
               <a:buChar char="●"/>
             </a:pPr>
             <a:r>
-              <a:rPr lang="en" sz="1300" b="0" i="0" u="sng" strike="noStrike" cap="none">
+              <a:rPr lang="en" sz="1000" b="0" i="0" u="sng" strike="noStrike" cap="none">
                 <a:solidFill>
                   <a:schemeClr val="hlink"/>
                 </a:solidFill>
@@ -15939,7 +15984,7 @@
               <a:t>https://contentatscale.ai</a:t>
             </a:r>
             <a:r>
-              <a:rPr lang="en" sz="1300" b="0" i="0" u="none" strike="noStrike" cap="none">
+              <a:rPr lang="en" sz="1000" b="0" i="0" u="none" strike="noStrike" cap="none">
                 <a:solidFill>
                   <a:srgbClr val="000000"/>
                 </a:solidFill>
@@ -15950,7 +15995,7 @@
               </a:rPr>
               <a:t> </a:t>
             </a:r>
-            <a:endParaRPr sz="1300" b="0" i="0" u="none" strike="noStrike" cap="none">
+            <a:endParaRPr sz="1000" b="0" i="0" u="none" strike="noStrike" cap="none">
               <a:solidFill>
                 <a:srgbClr val="000000"/>
               </a:solidFill>
@@ -15961,25 +16006,25 @@
             </a:endParaRPr>
           </a:p>
           <a:p>
-            <a:pPr marL="228600" marR="0" lvl="0" indent="-196850" algn="l" rtl="0">
-              <a:lnSpc>
-                <a:spcPct val="100000"/>
-              </a:lnSpc>
-              <a:spcBef>
-                <a:spcPts val="0"/>
-              </a:spcBef>
-              <a:spcAft>
-                <a:spcPts val="0"/>
-              </a:spcAft>
-              <a:buClr>
-                <a:srgbClr val="000000"/>
-              </a:buClr>
-              <a:buSzPts val="1300"/>
+            <a:pPr marL="228600" marR="0" lvl="0" indent="-177800" algn="l" rtl="0">
+              <a:lnSpc>
+                <a:spcPct val="100000"/>
+              </a:lnSpc>
+              <a:spcBef>
+                <a:spcPts val="0"/>
+              </a:spcBef>
+              <a:spcAft>
+                <a:spcPts val="0"/>
+              </a:spcAft>
+              <a:buClr>
+                <a:srgbClr val="000000"/>
+              </a:buClr>
+              <a:buSzPts val="1000"/>
               <a:buFont typeface="Calibri"/>
               <a:buChar char="●"/>
             </a:pPr>
             <a:r>
-              <a:rPr lang="en" sz="1300" b="0" i="0" u="sng" strike="noStrike" cap="none">
+              <a:rPr lang="en" sz="1000" b="0" i="0" u="sng" strike="noStrike" cap="none">
                 <a:solidFill>
                   <a:schemeClr val="hlink"/>
                 </a:solidFill>
@@ -15992,7 +16037,7 @@
               <a:t>https://gowinston.ai</a:t>
             </a:r>
             <a:r>
-              <a:rPr lang="en" sz="1300" b="0" i="0" u="none" strike="noStrike" cap="none">
+              <a:rPr lang="en" sz="1000" b="0" i="0" u="none" strike="noStrike" cap="none">
                 <a:solidFill>
                   <a:srgbClr val="000000"/>
                 </a:solidFill>
@@ -16003,7 +16048,7 @@
               </a:rPr>
               <a:t> </a:t>
             </a:r>
-            <a:endParaRPr sz="1300" b="0" i="0" u="none" strike="noStrike" cap="none">
+            <a:endParaRPr sz="1000" b="0" i="0" u="none" strike="noStrike" cap="none">
               <a:solidFill>
                 <a:srgbClr val="000000"/>
               </a:solidFill>
@@ -16014,25 +16059,25 @@
             </a:endParaRPr>
           </a:p>
           <a:p>
-            <a:pPr marL="228600" marR="0" lvl="0" indent="-196850" algn="l" rtl="0">
-              <a:lnSpc>
-                <a:spcPct val="100000"/>
-              </a:lnSpc>
-              <a:spcBef>
-                <a:spcPts val="0"/>
-              </a:spcBef>
-              <a:spcAft>
-                <a:spcPts val="0"/>
-              </a:spcAft>
-              <a:buClr>
-                <a:srgbClr val="000000"/>
-              </a:buClr>
-              <a:buSzPts val="1300"/>
+            <a:pPr marL="228600" marR="0" lvl="0" indent="-177800" algn="l" rtl="0">
+              <a:lnSpc>
+                <a:spcPct val="100000"/>
+              </a:lnSpc>
+              <a:spcBef>
+                <a:spcPts val="0"/>
+              </a:spcBef>
+              <a:spcAft>
+                <a:spcPts val="0"/>
+              </a:spcAft>
+              <a:buClr>
+                <a:srgbClr val="000000"/>
+              </a:buClr>
+              <a:buSzPts val="1000"/>
               <a:buFont typeface="Calibri"/>
               <a:buChar char="●"/>
             </a:pPr>
             <a:r>
-              <a:rPr lang="en" sz="1300" b="0" i="0" u="sng" strike="noStrike" cap="none">
+              <a:rPr lang="en" sz="1000" b="0" i="0" u="sng" strike="noStrike" cap="none">
                 <a:solidFill>
                   <a:schemeClr val="hlink"/>
                 </a:solidFill>
@@ -16044,7 +16089,7 @@
               </a:rPr>
               <a:t>https://copyleaks.com</a:t>
             </a:r>
-            <a:endParaRPr sz="1300" b="0" i="0" u="none" strike="noStrike" cap="none">
+            <a:endParaRPr sz="1000" b="0" i="0" u="none" strike="noStrike" cap="none">
               <a:solidFill>
                 <a:srgbClr val="000000"/>
               </a:solidFill>
@@ -16055,25 +16100,25 @@
             </a:endParaRPr>
           </a:p>
           <a:p>
-            <a:pPr marL="228600" marR="0" lvl="0" indent="-196850" algn="l" rtl="0">
-              <a:lnSpc>
-                <a:spcPct val="100000"/>
-              </a:lnSpc>
-              <a:spcBef>
-                <a:spcPts val="0"/>
-              </a:spcBef>
-              <a:spcAft>
-                <a:spcPts val="0"/>
-              </a:spcAft>
-              <a:buClr>
-                <a:srgbClr val="000000"/>
-              </a:buClr>
-              <a:buSzPts val="1300"/>
+            <a:pPr marL="228600" marR="0" lvl="0" indent="-177800" algn="l" rtl="0">
+              <a:lnSpc>
+                <a:spcPct val="100000"/>
+              </a:lnSpc>
+              <a:spcBef>
+                <a:spcPts val="0"/>
+              </a:spcBef>
+              <a:spcAft>
+                <a:spcPts val="0"/>
+              </a:spcAft>
+              <a:buClr>
+                <a:srgbClr val="000000"/>
+              </a:buClr>
+              <a:buSzPts val="1000"/>
               <a:buFont typeface="Calibri"/>
               <a:buChar char="●"/>
             </a:pPr>
             <a:r>
-              <a:rPr lang="en" sz="1300" b="0" i="0" u="sng" strike="noStrike" cap="none">
+              <a:rPr lang="en" sz="1000" b="0" i="0" u="sng" strike="noStrike" cap="none">
                 <a:solidFill>
                   <a:schemeClr val="hlink"/>
                 </a:solidFill>
@@ -16085,7 +16130,7 @@
               </a:rPr>
               <a:t>https://www.turnitin.com</a:t>
             </a:r>
-            <a:endParaRPr sz="1300" b="0" i="0" u="none" strike="noStrike" cap="none">
+            <a:endParaRPr sz="1000" b="0" i="0" u="none" strike="noStrike" cap="none">
               <a:solidFill>
                 <a:srgbClr val="000000"/>
               </a:solidFill>
@@ -16096,25 +16141,25 @@
             </a:endParaRPr>
           </a:p>
           <a:p>
-            <a:pPr marL="228600" marR="0" lvl="0" indent="-196850" algn="l" rtl="0">
-              <a:lnSpc>
-                <a:spcPct val="100000"/>
-              </a:lnSpc>
-              <a:spcBef>
-                <a:spcPts val="0"/>
-              </a:spcBef>
-              <a:spcAft>
-                <a:spcPts val="0"/>
-              </a:spcAft>
-              <a:buClr>
-                <a:srgbClr val="000000"/>
-              </a:buClr>
-              <a:buSzPts val="1300"/>
+            <a:pPr marL="228600" marR="0" lvl="0" indent="-177800" algn="l" rtl="0">
+              <a:lnSpc>
+                <a:spcPct val="100000"/>
+              </a:lnSpc>
+              <a:spcBef>
+                <a:spcPts val="0"/>
+              </a:spcBef>
+              <a:spcAft>
+                <a:spcPts val="0"/>
+              </a:spcAft>
+              <a:buClr>
+                <a:srgbClr val="000000"/>
+              </a:buClr>
+              <a:buSzPts val="1000"/>
               <a:buFont typeface="Calibri"/>
               <a:buChar char="●"/>
             </a:pPr>
             <a:r>
-              <a:rPr lang="en" sz="1300" b="0" i="0" u="sng" strike="noStrike" cap="none">
+              <a:rPr lang="en" sz="1000" b="0" i="0" u="sng" strike="noStrike" cap="none">
                 <a:solidFill>
                   <a:schemeClr val="hlink"/>
                 </a:solidFill>
@@ -16127,7 +16172,7 @@
               <a:t>https://gptzero.me</a:t>
             </a:r>
             <a:r>
-              <a:rPr lang="en" sz="1300" b="0" i="0" u="none" strike="noStrike" cap="none">
+              <a:rPr lang="en" sz="1000" b="0" i="0" u="none" strike="noStrike" cap="none">
                 <a:solidFill>
                   <a:srgbClr val="000000"/>
                 </a:solidFill>
@@ -16138,7 +16183,7 @@
               </a:rPr>
               <a:t> </a:t>
             </a:r>
-            <a:endParaRPr sz="1300" b="0" i="0" u="none" strike="noStrike" cap="none">
+            <a:endParaRPr sz="1000" b="0" i="0" u="none" strike="noStrike" cap="none">
               <a:solidFill>
                 <a:srgbClr val="000000"/>
               </a:solidFill>
@@ -16152,13 +16197,13 @@
       </p:sp>
       <p:sp>
         <p:nvSpPr>
-          <p:cNvPr id="165" name="Google Shape;165;p25"/>
+          <p:cNvPr id="166" name="Google Shape;166;p25"/>
           <p:cNvSpPr txBox="1"/>
           <p:nvPr/>
         </p:nvSpPr>
         <p:spPr>
           <a:xfrm>
-            <a:off x="72300" y="3653400"/>
+            <a:off x="72300" y="3371028"/>
             <a:ext cx="3592800" cy="585000"/>
           </a:xfrm>
           <a:prstGeom prst="rect">
@@ -16263,14 +16308,14 @@
       </p:sp>
       <p:sp>
         <p:nvSpPr>
-          <p:cNvPr id="166" name="Google Shape;166;p25"/>
+          <p:cNvPr id="167" name="Google Shape;167;p25"/>
           <p:cNvSpPr txBox="1"/>
           <p:nvPr/>
         </p:nvSpPr>
         <p:spPr>
           <a:xfrm>
             <a:off x="4363450" y="541550"/>
-            <a:ext cx="4609500" cy="1785600"/>
+            <a:ext cx="4609500" cy="1693200"/>
           </a:xfrm>
           <a:prstGeom prst="rect">
             <a:avLst/>
@@ -16484,7 +16529,7 @@
               <a:buNone/>
             </a:pPr>
             <a:r>
-              <a:rPr lang="en" sz="1300" b="0" i="0" u="sng" strike="noStrike" cap="none">
+              <a:rPr lang="en" sz="1000" b="0" i="0" u="sng" strike="noStrike" cap="none">
                 <a:solidFill>
                   <a:schemeClr val="hlink"/>
                 </a:solidFill>
@@ -16497,6 +16542,18 @@
               <a:t>https://www.tripo3d.ai</a:t>
             </a:r>
             <a:r>
+              <a:rPr lang="en" sz="1000" b="0" i="0" u="none" strike="noStrike" cap="none">
+                <a:solidFill>
+                  <a:srgbClr val="000000"/>
+                </a:solidFill>
+                <a:latin typeface="Calibri"/>
+                <a:ea typeface="Calibri"/>
+                <a:cs typeface="Calibri"/>
+                <a:sym typeface="Calibri"/>
+              </a:rPr>
+              <a:t> </a:t>
+            </a:r>
+            <a:r>
               <a:rPr lang="en" sz="1300" b="0" i="0" u="none" strike="noStrike" cap="none">
                 <a:solidFill>
                   <a:srgbClr val="000000"/>
@@ -16506,7 +16563,7 @@
                 <a:cs typeface="Calibri"/>
                 <a:sym typeface="Calibri"/>
               </a:rPr>
-              <a:t> - generate 3d images from photos in under a second.</a:t>
+              <a:t>- generate 3d images from photos in under a second.</a:t>
             </a:r>
             <a:endParaRPr sz="1300" b="0" i="0" u="none" strike="noStrike" cap="none">
               <a:solidFill>
@@ -16537,7 +16594,7 @@
               <a:buNone/>
             </a:pPr>
             <a:r>
-              <a:rPr lang="en" sz="1300" b="0" i="0" u="sng" strike="noStrike" cap="none">
+              <a:rPr lang="en" sz="1000" b="0" i="0" u="sng" strike="noStrike" cap="none">
                 <a:solidFill>
                   <a:schemeClr val="hlink"/>
                 </a:solidFill>
@@ -16550,7 +16607,7 @@
               <a:t>https://arxiv.org/abs/2311.04400</a:t>
             </a:r>
             <a:r>
-              <a:rPr lang="en" sz="1300" b="0" i="0" u="none" strike="noStrike" cap="none">
+              <a:rPr lang="en" sz="1000" b="0" i="0" u="none" strike="noStrike" cap="none">
                 <a:solidFill>
                   <a:srgbClr val="000000"/>
                 </a:solidFill>
@@ -16561,7 +16618,7 @@
               </a:rPr>
               <a:t> </a:t>
             </a:r>
-            <a:endParaRPr sz="1300" b="0" i="0" u="none" strike="noStrike" cap="none">
+            <a:endParaRPr sz="1000" b="0" i="0" u="none" strike="noStrike" cap="none">
               <a:solidFill>
                 <a:srgbClr val="000000"/>
               </a:solidFill>
@@ -16590,7 +16647,7 @@
               <a:buNone/>
             </a:pPr>
             <a:r>
-              <a:rPr lang="en" sz="1300" b="0" i="0" u="sng" strike="noStrike" cap="none">
+              <a:rPr lang="en" sz="1000" b="0" i="0" u="sng" strike="noStrike" cap="none">
                 <a:solidFill>
                   <a:schemeClr val="hlink"/>
                 </a:solidFill>
@@ -16603,7 +16660,7 @@
               <a:t>https://stability.ai/news/triposr-3d-generation</a:t>
             </a:r>
             <a:r>
-              <a:rPr lang="en" sz="1300" b="0" i="0" u="none" strike="noStrike" cap="none">
+              <a:rPr lang="en" sz="1000" b="0" i="0" u="none" strike="noStrike" cap="none">
                 <a:solidFill>
                   <a:srgbClr val="000000"/>
                 </a:solidFill>
@@ -16614,7 +16671,7 @@
               </a:rPr>
               <a:t> </a:t>
             </a:r>
-            <a:endParaRPr sz="1300" b="0" i="0" u="none" strike="noStrike" cap="none">
+            <a:endParaRPr sz="1000" b="0" i="0" u="none" strike="noStrike" cap="none">
               <a:solidFill>
                 <a:srgbClr val="000000"/>
               </a:solidFill>
@@ -16628,13 +16685,13 @@
       </p:sp>
       <p:sp>
         <p:nvSpPr>
-          <p:cNvPr id="167" name="Google Shape;167;p25"/>
+          <p:cNvPr id="168" name="Google Shape;168;p25"/>
           <p:cNvSpPr txBox="1"/>
           <p:nvPr/>
         </p:nvSpPr>
         <p:spPr>
           <a:xfrm>
-            <a:off x="72300" y="4314600"/>
+            <a:off x="72300" y="4047180"/>
             <a:ext cx="3592800" cy="585000"/>
           </a:xfrm>
           <a:prstGeom prst="rect">
@@ -16754,13 +16811,13 @@
       </p:sp>
       <p:sp>
         <p:nvSpPr>
-          <p:cNvPr id="168" name="Google Shape;168;p25"/>
+          <p:cNvPr id="169" name="Google Shape;169;p25"/>
           <p:cNvSpPr txBox="1"/>
           <p:nvPr/>
         </p:nvSpPr>
         <p:spPr>
           <a:xfrm>
-            <a:off x="4363450" y="2385450"/>
+            <a:off x="4363450" y="2363022"/>
             <a:ext cx="4609500" cy="538800"/>
           </a:xfrm>
           <a:prstGeom prst="rect">
@@ -16893,7 +16950,7 @@
       </p:sp>
       <p:sp>
         <p:nvSpPr>
-          <p:cNvPr id="169" name="Google Shape;169;p25"/>
+          <p:cNvPr id="170" name="Google Shape;170;p25"/>
           <p:cNvSpPr txBox="1"/>
           <p:nvPr/>
         </p:nvSpPr>
@@ -17004,7 +17061,7 @@
       </p:sp>
       <p:sp>
         <p:nvSpPr>
-          <p:cNvPr id="170" name="Google Shape;170;p25"/>
+          <p:cNvPr id="171" name="Google Shape;171;p25"/>
           <p:cNvSpPr txBox="1"/>
           <p:nvPr/>
         </p:nvSpPr>
@@ -17173,7 +17230,7 @@
   <p:cSld>
     <p:spTree>
       <p:nvGrpSpPr>
-        <p:cNvPr id="1" name="Shape 174"/>
+        <p:cNvPr id="1" name="Shape 175"/>
         <p:cNvGrpSpPr/>
         <p:nvPr/>
       </p:nvGrpSpPr>
@@ -17187,7 +17244,7 @@
       </p:grpSpPr>
       <p:sp>
         <p:nvSpPr>
-          <p:cNvPr id="175" name="Google Shape;175;p26"/>
+          <p:cNvPr id="176" name="Google Shape;176;p26"/>
           <p:cNvSpPr txBox="1"/>
           <p:nvPr/>
         </p:nvSpPr>
@@ -17253,7 +17310,7 @@
       </p:sp>
       <p:sp>
         <p:nvSpPr>
-          <p:cNvPr id="176" name="Google Shape;176;p26"/>
+          <p:cNvPr id="177" name="Google Shape;177;p26"/>
           <p:cNvSpPr txBox="1"/>
           <p:nvPr/>
         </p:nvSpPr>
@@ -17391,7 +17448,7 @@
       </p:sp>
       <p:sp>
         <p:nvSpPr>
-          <p:cNvPr id="177" name="Google Shape;177;p26"/>
+          <p:cNvPr id="178" name="Google Shape;178;p26"/>
           <p:cNvSpPr txBox="1"/>
           <p:nvPr/>
         </p:nvSpPr>
@@ -17554,7 +17611,7 @@
       </p:sp>
       <p:sp>
         <p:nvSpPr>
-          <p:cNvPr id="178" name="Google Shape;178;p26"/>
+          <p:cNvPr id="179" name="Google Shape;179;p26"/>
           <p:cNvSpPr txBox="1"/>
           <p:nvPr/>
         </p:nvSpPr>
@@ -17664,7 +17721,7 @@
       </p:sp>
       <p:sp>
         <p:nvSpPr>
-          <p:cNvPr id="179" name="Google Shape;179;p26"/>
+          <p:cNvPr id="180" name="Google Shape;180;p26"/>
           <p:cNvSpPr txBox="1"/>
           <p:nvPr/>
         </p:nvSpPr>
@@ -18127,7 +18184,7 @@
       </p:sp>
       <p:sp>
         <p:nvSpPr>
-          <p:cNvPr id="180" name="Google Shape;180;p26"/>
+          <p:cNvPr id="181" name="Google Shape;181;p26"/>
           <p:cNvSpPr txBox="1"/>
           <p:nvPr/>
         </p:nvSpPr>
@@ -18459,7 +18516,7 @@
       </p:sp>
       <p:sp>
         <p:nvSpPr>
-          <p:cNvPr id="181" name="Google Shape;181;p26"/>
+          <p:cNvPr id="182" name="Google Shape;182;p26"/>
           <p:cNvSpPr txBox="1"/>
           <p:nvPr/>
         </p:nvSpPr>
@@ -18517,7 +18574,7 @@
                 <a:cs typeface="Calibri"/>
                 <a:sym typeface="Calibri"/>
               </a:rPr>
-              <a:t>"LLMs are just stochastic parrots "</a:t>
+              <a:t>"LLMs are just stochastic parrots"</a:t>
             </a:r>
             <a:endParaRPr sz="1300">
               <a:solidFill>
@@ -18572,7 +18629,7 @@
   <p:cSld>
     <p:spTree>
       <p:nvGrpSpPr>
-        <p:cNvPr id="1" name="Shape 185"/>
+        <p:cNvPr id="1" name="Shape 186"/>
         <p:cNvGrpSpPr/>
         <p:nvPr/>
       </p:nvGrpSpPr>
@@ -18586,7 +18643,7 @@
       </p:grpSpPr>
       <p:sp>
         <p:nvSpPr>
-          <p:cNvPr id="186" name="Google Shape;186;p27"/>
+          <p:cNvPr id="187" name="Google Shape;187;p27"/>
           <p:cNvSpPr txBox="1"/>
           <p:nvPr/>
         </p:nvSpPr>
@@ -18652,14 +18709,14 @@
       </p:sp>
       <p:sp>
         <p:nvSpPr>
-          <p:cNvPr id="187" name="Google Shape;187;p27"/>
+          <p:cNvPr id="188" name="Google Shape;188;p27"/>
           <p:cNvSpPr txBox="1"/>
           <p:nvPr/>
         </p:nvSpPr>
         <p:spPr>
           <a:xfrm>
             <a:off x="72300" y="555150"/>
-            <a:ext cx="4380600" cy="1785600"/>
+            <a:ext cx="4380600" cy="1693200"/>
           </a:xfrm>
           <a:prstGeom prst="rect">
             <a:avLst/>
@@ -18741,7 +18798,7 @@
               <a:buNone/>
             </a:pPr>
             <a:r>
-              <a:rPr lang="en" sz="1300" b="0" i="0" u="sng" strike="noStrike" cap="none">
+              <a:rPr lang="en" sz="1000" b="0" i="0" u="sng" strike="noStrike" cap="none">
                 <a:solidFill>
                   <a:schemeClr val="hlink"/>
                 </a:solidFill>
@@ -18754,7 +18811,7 @@
               <a:t>https://techcrunch.com/2024/03/05/amazons-new-rufus-chatbot-isnt-bad-but-it-isnt-great-either/</a:t>
             </a:r>
             <a:r>
-              <a:rPr lang="en" sz="1300" b="0" i="0" u="none" strike="noStrike" cap="none">
+              <a:rPr lang="en" sz="1000" b="0" i="0" u="none" strike="noStrike" cap="none">
                 <a:solidFill>
                   <a:srgbClr val="000000"/>
                 </a:solidFill>
@@ -18765,7 +18822,7 @@
               </a:rPr>
               <a:t> </a:t>
             </a:r>
-            <a:endParaRPr sz="1300" b="0" i="0" u="none" strike="noStrike" cap="none">
+            <a:endParaRPr sz="1000" b="0" i="0" u="none" strike="noStrike" cap="none">
               <a:solidFill>
                 <a:srgbClr val="000000"/>
               </a:solidFill>
@@ -18847,7 +18904,7 @@
       </p:sp>
       <p:pic>
         <p:nvPicPr>
-          <p:cNvPr id="188" name="Google Shape;188;p27"/>
+          <p:cNvPr id="189" name="Google Shape;189;p27"/>
           <p:cNvPicPr preferRelativeResize="0"/>
           <p:nvPr/>
         </p:nvPicPr>
@@ -18891,7 +18948,7 @@
   <p:cSld>
     <p:spTree>
       <p:nvGrpSpPr>
-        <p:cNvPr id="1" name="Shape 192"/>
+        <p:cNvPr id="1" name="Shape 193"/>
         <p:cNvGrpSpPr/>
         <p:nvPr/>
       </p:nvGrpSpPr>
@@ -18905,7 +18962,7 @@
       </p:grpSpPr>
       <p:sp>
         <p:nvSpPr>
-          <p:cNvPr id="193" name="Google Shape;193;p28"/>
+          <p:cNvPr id="194" name="Google Shape;194;p28"/>
           <p:cNvSpPr txBox="1"/>
           <p:nvPr/>
         </p:nvSpPr>
@@ -18971,7 +19028,7 @@
       </p:sp>
       <p:sp>
         <p:nvSpPr>
-          <p:cNvPr id="194" name="Google Shape;194;p28"/>
+          <p:cNvPr id="195" name="Google Shape;195;p28"/>
           <p:cNvSpPr txBox="1"/>
           <p:nvPr/>
         </p:nvSpPr>
@@ -19409,7 +19466,7 @@
       </p:sp>
       <p:pic>
         <p:nvPicPr>
-          <p:cNvPr id="195" name="Google Shape;195;p28"/>
+          <p:cNvPr id="196" name="Google Shape;196;p28"/>
           <p:cNvPicPr preferRelativeResize="0"/>
           <p:nvPr/>
         </p:nvPicPr>
@@ -19447,7 +19504,7 @@
   <p:cSld>
     <p:spTree>
       <p:nvGrpSpPr>
-        <p:cNvPr id="1" name="Shape 199"/>
+        <p:cNvPr id="1" name="Shape 200"/>
         <p:cNvGrpSpPr/>
         <p:nvPr/>
       </p:nvGrpSpPr>
@@ -19461,7 +19518,7 @@
       </p:grpSpPr>
       <p:sp>
         <p:nvSpPr>
-          <p:cNvPr id="200" name="Google Shape;200;p29"/>
+          <p:cNvPr id="201" name="Google Shape;201;p29"/>
           <p:cNvSpPr txBox="1"/>
           <p:nvPr/>
         </p:nvSpPr>
@@ -19527,13 +19584,13 @@
       </p:sp>
       <p:sp>
         <p:nvSpPr>
-          <p:cNvPr id="201" name="Google Shape;201;p29"/>
+          <p:cNvPr id="202" name="Google Shape;202;p29"/>
           <p:cNvSpPr txBox="1"/>
           <p:nvPr/>
         </p:nvSpPr>
         <p:spPr>
           <a:xfrm>
-            <a:off x="72300" y="2317000"/>
+            <a:off x="72300" y="2279620"/>
             <a:ext cx="4381500" cy="1985700"/>
           </a:xfrm>
           <a:prstGeom prst="rect">
@@ -19745,7 +19802,7 @@
       </p:sp>
       <p:sp>
         <p:nvSpPr>
-          <p:cNvPr id="202" name="Google Shape;202;p29"/>
+          <p:cNvPr id="203" name="Google Shape;203;p29"/>
           <p:cNvSpPr txBox="1"/>
           <p:nvPr/>
         </p:nvSpPr>
@@ -20028,7 +20085,7 @@
       </p:sp>
       <p:sp>
         <p:nvSpPr>
-          <p:cNvPr id="203" name="Google Shape;203;p29"/>
+          <p:cNvPr id="204" name="Google Shape;204;p29"/>
           <p:cNvSpPr txBox="1"/>
           <p:nvPr/>
         </p:nvSpPr>
@@ -20182,13 +20239,13 @@
       </p:sp>
       <p:sp>
         <p:nvSpPr>
-          <p:cNvPr id="204" name="Google Shape;204;p29"/>
+          <p:cNvPr id="205" name="Google Shape;205;p29"/>
           <p:cNvSpPr txBox="1"/>
           <p:nvPr/>
         </p:nvSpPr>
         <p:spPr>
           <a:xfrm>
-            <a:off x="4638725" y="2383866"/>
+            <a:off x="4638725" y="2377166"/>
             <a:ext cx="4381500" cy="2647500"/>
           </a:xfrm>
           <a:prstGeom prst="rect">
@@ -20879,7 +20936,7 @@
   <p:cSld>
     <p:spTree>
       <p:nvGrpSpPr>
-        <p:cNvPr id="1" name="Shape 208"/>
+        <p:cNvPr id="1" name="Shape 209"/>
         <p:cNvGrpSpPr/>
         <p:nvPr/>
       </p:nvGrpSpPr>
@@ -20893,7 +20950,7 @@
       </p:grpSpPr>
       <p:sp>
         <p:nvSpPr>
-          <p:cNvPr id="209" name="Google Shape;209;p30"/>
+          <p:cNvPr id="210" name="Google Shape;210;p30"/>
           <p:cNvSpPr txBox="1"/>
           <p:nvPr/>
         </p:nvSpPr>
@@ -20999,7 +21056,7 @@
       </p:sp>
       <p:sp>
         <p:nvSpPr>
-          <p:cNvPr id="210" name="Google Shape;210;p30"/>
+          <p:cNvPr id="211" name="Google Shape;211;p30"/>
           <p:cNvSpPr txBox="1"/>
           <p:nvPr/>
         </p:nvSpPr>
@@ -21405,7 +21462,7 @@
       </p:sp>
       <p:pic>
         <p:nvPicPr>
-          <p:cNvPr id="211" name="Google Shape;211;p30"/>
+          <p:cNvPr id="212" name="Google Shape;212;p30"/>
           <p:cNvPicPr preferRelativeResize="0"/>
           <p:nvPr/>
         </p:nvPicPr>
@@ -21438,7 +21495,7 @@
       </p:pic>
       <p:pic>
         <p:nvPicPr>
-          <p:cNvPr id="212" name="Google Shape;212;p30"/>
+          <p:cNvPr id="213" name="Google Shape;213;p30"/>
           <p:cNvPicPr preferRelativeResize="0"/>
           <p:nvPr/>
         </p:nvPicPr>
@@ -21482,7 +21539,7 @@
   <p:cSld>
     <p:spTree>
       <p:nvGrpSpPr>
-        <p:cNvPr id="1" name="Shape 216"/>
+        <p:cNvPr id="1" name="Shape 217"/>
         <p:cNvGrpSpPr/>
         <p:nvPr/>
       </p:nvGrpSpPr>
@@ -21496,7 +21553,7 @@
       </p:grpSpPr>
       <p:sp>
         <p:nvSpPr>
-          <p:cNvPr id="217" name="Google Shape;217;p31"/>
+          <p:cNvPr id="218" name="Google Shape;218;p31"/>
           <p:cNvSpPr txBox="1"/>
           <p:nvPr/>
         </p:nvSpPr>
@@ -21562,7 +21619,7 @@
       </p:sp>
       <p:sp>
         <p:nvSpPr>
-          <p:cNvPr id="218" name="Google Shape;218;p31"/>
+          <p:cNvPr id="219" name="Google Shape;219;p31"/>
           <p:cNvSpPr txBox="1"/>
           <p:nvPr/>
         </p:nvSpPr>
@@ -21940,7 +21997,7 @@
       </p:sp>
       <p:pic>
         <p:nvPicPr>
-          <p:cNvPr id="219" name="Google Shape;219;p31"/>
+          <p:cNvPr id="220" name="Google Shape;220;p31"/>
           <p:cNvPicPr preferRelativeResize="0"/>
           <p:nvPr/>
         </p:nvPicPr>
@@ -21973,7 +22030,7 @@
       </p:pic>
       <p:pic>
         <p:nvPicPr>
-          <p:cNvPr id="220" name="Google Shape;220;p31"/>
+          <p:cNvPr id="221" name="Google Shape;221;p31"/>
           <p:cNvPicPr preferRelativeResize="0"/>
           <p:nvPr/>
         </p:nvPicPr>
@@ -22006,7 +22063,7 @@
       </p:pic>
       <p:pic>
         <p:nvPicPr>
-          <p:cNvPr id="221" name="Google Shape;221;p31"/>
+          <p:cNvPr id="222" name="Google Shape;222;p31"/>
           <p:cNvPicPr preferRelativeResize="0"/>
           <p:nvPr/>
         </p:nvPicPr>
@@ -22039,7 +22096,7 @@
       </p:pic>
       <p:pic>
         <p:nvPicPr>
-          <p:cNvPr id="222" name="Google Shape;222;p31"/>
+          <p:cNvPr id="223" name="Google Shape;223;p31"/>
           <p:cNvPicPr preferRelativeResize="0"/>
           <p:nvPr/>
         </p:nvPicPr>
@@ -22808,7 +22865,7 @@
   <p:cSld>
     <p:spTree>
       <p:nvGrpSpPr>
-        <p:cNvPr id="1" name="Shape 226"/>
+        <p:cNvPr id="1" name="Shape 227"/>
         <p:cNvGrpSpPr/>
         <p:nvPr/>
       </p:nvGrpSpPr>
@@ -22822,7 +22879,7 @@
       </p:grpSpPr>
       <p:sp>
         <p:nvSpPr>
-          <p:cNvPr id="227" name="Google Shape;227;p32"/>
+          <p:cNvPr id="228" name="Google Shape;228;p32"/>
           <p:cNvSpPr txBox="1"/>
           <p:nvPr/>
         </p:nvSpPr>
@@ -22928,7 +22985,7 @@
       </p:sp>
       <p:sp>
         <p:nvSpPr>
-          <p:cNvPr id="228" name="Google Shape;228;p32"/>
+          <p:cNvPr id="229" name="Google Shape;229;p32"/>
           <p:cNvSpPr txBox="1"/>
           <p:nvPr/>
         </p:nvSpPr>
@@ -23042,7 +23099,7 @@
       </p:sp>
       <p:sp>
         <p:nvSpPr>
-          <p:cNvPr id="229" name="Google Shape;229;p32"/>
+          <p:cNvPr id="230" name="Google Shape;230;p32"/>
           <p:cNvSpPr txBox="1"/>
           <p:nvPr/>
         </p:nvSpPr>
@@ -23108,7 +23165,7 @@
       </p:sp>
       <p:sp>
         <p:nvSpPr>
-          <p:cNvPr id="230" name="Google Shape;230;p32"/>
+          <p:cNvPr id="231" name="Google Shape;231;p32"/>
           <p:cNvSpPr txBox="1"/>
           <p:nvPr/>
         </p:nvSpPr>
@@ -23187,7 +23244,7 @@
       </p:sp>
       <p:pic>
         <p:nvPicPr>
-          <p:cNvPr id="231" name="Google Shape;231;p32"/>
+          <p:cNvPr id="232" name="Google Shape;232;p32"/>
           <p:cNvPicPr preferRelativeResize="0"/>
           <p:nvPr/>
         </p:nvPicPr>
@@ -23220,7 +23277,7 @@
       </p:pic>
       <p:sp>
         <p:nvSpPr>
-          <p:cNvPr id="232" name="Google Shape;232;p32"/>
+          <p:cNvPr id="233" name="Google Shape;233;p32"/>
           <p:cNvSpPr txBox="1"/>
           <p:nvPr/>
         </p:nvSpPr>
@@ -23305,7 +23362,7 @@
   <p:cSld>
     <p:spTree>
       <p:nvGrpSpPr>
-        <p:cNvPr id="1" name="Shape 236"/>
+        <p:cNvPr id="1" name="Shape 237"/>
         <p:cNvGrpSpPr/>
         <p:nvPr/>
       </p:nvGrpSpPr>
@@ -23319,7 +23376,7 @@
       </p:grpSpPr>
       <p:sp>
         <p:nvSpPr>
-          <p:cNvPr id="237" name="Google Shape;237;p33"/>
+          <p:cNvPr id="238" name="Google Shape;238;p33"/>
           <p:cNvSpPr txBox="1"/>
           <p:nvPr/>
         </p:nvSpPr>
@@ -23385,7 +23442,7 @@
       </p:sp>
       <p:sp>
         <p:nvSpPr>
-          <p:cNvPr id="238" name="Google Shape;238;p33"/>
+          <p:cNvPr id="239" name="Google Shape;239;p33"/>
           <p:cNvSpPr txBox="1"/>
           <p:nvPr/>
         </p:nvSpPr>
@@ -23488,7 +23545,7 @@
       </p:sp>
       <p:sp>
         <p:nvSpPr>
-          <p:cNvPr id="239" name="Google Shape;239;p33"/>
+          <p:cNvPr id="240" name="Google Shape;240;p33"/>
           <p:cNvSpPr txBox="1"/>
           <p:nvPr/>
         </p:nvSpPr>
@@ -23556,7 +23613,7 @@
       </p:sp>
       <p:pic>
         <p:nvPicPr>
-          <p:cNvPr id="240" name="Google Shape;240;p33"/>
+          <p:cNvPr id="241" name="Google Shape;241;p33"/>
           <p:cNvPicPr preferRelativeResize="0"/>
           <p:nvPr/>
         </p:nvPicPr>
@@ -23594,7 +23651,7 @@
       </p:pic>
       <p:sp>
         <p:nvSpPr>
-          <p:cNvPr id="241" name="Google Shape;241;p33"/>
+          <p:cNvPr id="242" name="Google Shape;242;p33"/>
           <p:cNvSpPr txBox="1"/>
           <p:nvPr/>
         </p:nvSpPr>
@@ -23820,7 +23877,7 @@
       </p:sp>
       <p:pic>
         <p:nvPicPr>
-          <p:cNvPr id="242" name="Google Shape;242;p33"/>
+          <p:cNvPr id="243" name="Google Shape;243;p33"/>
           <p:cNvPicPr preferRelativeResize="0"/>
           <p:nvPr/>
         </p:nvPicPr>
@@ -23864,7 +23921,7 @@
   <p:cSld>
     <p:spTree>
       <p:nvGrpSpPr>
-        <p:cNvPr id="1" name="Shape 246"/>
+        <p:cNvPr id="1" name="Shape 247"/>
         <p:cNvGrpSpPr/>
         <p:nvPr/>
       </p:nvGrpSpPr>
@@ -23878,7 +23935,7 @@
       </p:grpSpPr>
       <p:sp>
         <p:nvSpPr>
-          <p:cNvPr id="247" name="Google Shape;247;p34"/>
+          <p:cNvPr id="248" name="Google Shape;248;p34"/>
           <p:cNvSpPr txBox="1"/>
           <p:nvPr/>
         </p:nvSpPr>
@@ -24403,7 +24460,7 @@
             <a:tbl>
               <a:tblPr>
                 <a:noFill/>
-                <a:tableStyleId>{E2AC4863-72E2-4972-9084-2C551902114E}</a:tableStyleId>
+                <a:tableStyleId>{8972C5D2-067A-4197-AE4E-556AA865EC1D}</a:tableStyleId>
               </a:tblPr>
               <a:tblGrid>
                 <a:gridCol w="1246150">
@@ -27451,7 +27508,7 @@
             <a:tbl>
               <a:tblPr>
                 <a:noFill/>
-                <a:tableStyleId>{9782951D-C409-4938-ADF1-328B5657FEDD}</a:tableStyleId>
+                <a:tableStyleId>{B6461172-1845-49C5-BBBF-5C60CFF49D76}</a:tableStyleId>
               </a:tblPr>
               <a:tblGrid>
                 <a:gridCol w="398475">
@@ -31181,16 +31238,21 @@
           <p:nvPr/>
         </p:nvPicPr>
         <p:blipFill rotWithShape="1">
-          <a:blip r:embed="rId6">
+          <a:blip r:embed="rId6" cstate="email">
             <a:alphaModFix/>
+            <a:extLst>
+              <a:ext uri="{28A0092B-C50C-407E-A947-70E740481C1C}">
+                <a14:useLocalDpi xmlns:a14="http://schemas.microsoft.com/office/drawing/2010/main"/>
+              </a:ext>
+            </a:extLst>
           </a:blip>
           <a:srcRect/>
           <a:stretch/>
         </p:blipFill>
         <p:spPr>
           <a:xfrm>
-            <a:off x="203770" y="3065869"/>
-            <a:ext cx="2978824" cy="2042676"/>
+            <a:off x="203773" y="3700623"/>
+            <a:ext cx="2053150" cy="1407925"/>
           </a:xfrm>
           <a:prstGeom prst="rect">
             <a:avLst/>
@@ -31208,16 +31270,21 @@
           <p:nvPr/>
         </p:nvPicPr>
         <p:blipFill rotWithShape="1">
-          <a:blip r:embed="rId7">
+          <a:blip r:embed="rId7" cstate="email">
             <a:alphaModFix/>
+            <a:extLst>
+              <a:ext uri="{28A0092B-C50C-407E-A947-70E740481C1C}">
+                <a14:useLocalDpi xmlns:a14="http://schemas.microsoft.com/office/drawing/2010/main"/>
+              </a:ext>
+            </a:extLst>
           </a:blip>
           <a:srcRect/>
           <a:stretch/>
         </p:blipFill>
         <p:spPr>
           <a:xfrm>
-            <a:off x="3236020" y="3065869"/>
-            <a:ext cx="2584477" cy="1931275"/>
+            <a:off x="2563199" y="3425574"/>
+            <a:ext cx="2085175" cy="1558175"/>
           </a:xfrm>
           <a:prstGeom prst="rect">
             <a:avLst/>
@@ -31243,8 +31310,8 @@
         </p:blipFill>
         <p:spPr>
           <a:xfrm>
-            <a:off x="6030595" y="3392681"/>
-            <a:ext cx="2914100" cy="1623975"/>
+            <a:off x="5065102" y="2854617"/>
+            <a:ext cx="3879600" cy="2162031"/>
           </a:xfrm>
           <a:prstGeom prst="rect">
             <a:avLst/>
@@ -31394,7 +31461,7 @@
         </p:nvSpPr>
         <p:spPr>
           <a:xfrm>
-            <a:off x="126000" y="694600"/>
+            <a:off x="1426850" y="1180550"/>
             <a:ext cx="6373200" cy="3186300"/>
           </a:xfrm>
           <a:prstGeom prst="rect">
@@ -31953,7 +32020,7 @@
         </p:nvSpPr>
         <p:spPr>
           <a:xfrm>
-            <a:off x="99150" y="546000"/>
+            <a:off x="1353675" y="770275"/>
             <a:ext cx="6373200" cy="3894300"/>
           </a:xfrm>
           <a:prstGeom prst="rect">
